--- a/metro/metro-f11-price-reduction.pptx
+++ b/metro/metro-f11-price-reduction.pptx
@@ -3514,9 +3514,9 @@
                 <a:solidFill>
                   <a:srgbClr val="14161A"/>
                 </a:solidFill>
-                <a:latin typeface="Space Grotesk"/>
-                <a:ea typeface="Space Grotesk"/>
-                <a:cs typeface="Space Grotesk"/>
+                <a:latin typeface="HK Grotesk"/>
+                <a:ea typeface="HK Grotesk"/>
+                <a:cs typeface="HK Grotesk"/>
               </a:rPr>
               <a:t>NO</a:t>
             </a:r>
@@ -3553,9 +3553,9 @@
                 <a:solidFill>
                   <a:srgbClr val="14161A"/>
                 </a:solidFill>
-                <a:latin typeface="Space Grotesk"/>
-                <a:ea typeface="Space Grotesk"/>
-                <a:cs typeface="Space Grotesk"/>
+                <a:latin typeface="HK Grotesk"/>
+                <a:ea typeface="HK Grotesk"/>
+                <a:cs typeface="HK Grotesk"/>
               </a:rPr>
               <a:t>North &amp; Oak</a:t>
             </a:r>
@@ -3697,9 +3697,9 @@
                 <a:solidFill>
                   <a:srgbClr val="14161A"/>
                 </a:solidFill>
-                <a:latin typeface="Space Grotesk"/>
-                <a:ea typeface="Space Grotesk"/>
-                <a:cs typeface="Space Grotesk"/>
+                <a:latin typeface="HK Grotesk"/>
+                <a:ea typeface="HK Grotesk"/>
+                <a:cs typeface="HK Grotesk"/>
               </a:rPr>
               <a:t>New price.</a:t>
             </a:r>
@@ -3732,9 +3732,9 @@
                 <a:solidFill>
                   <a:srgbClr val="8A8F99"/>
                 </a:solidFill>
-                <a:latin typeface="Space Grotesk"/>
-                <a:ea typeface="Space Grotesk"/>
-                <a:cs typeface="Space Grotesk"/>
+                <a:latin typeface="HK Grotesk"/>
+                <a:ea typeface="HK Grotesk"/>
+                <a:cs typeface="HK Grotesk"/>
               </a:rPr>
               <a:t>On a home that hasn’t moved.</a:t>
             </a:r>
@@ -3767,9 +3767,9 @@
                 <a:solidFill>
                   <a:srgbClr val="8A8F99"/>
                 </a:solidFill>
-                <a:latin typeface="Space Grotesk"/>
-                <a:ea typeface="Space Grotesk"/>
-                <a:cs typeface="Space Grotesk"/>
+                <a:latin typeface="HK Grotesk"/>
+                <a:ea typeface="HK Grotesk"/>
+                <a:cs typeface="HK Grotesk"/>
               </a:rPr>
               <a:t>$945,000</a:t>
             </a:r>
@@ -3802,9 +3802,9 @@
                 <a:solidFill>
                   <a:srgbClr val="2D5BE3"/>
                 </a:solidFill>
-                <a:latin typeface="Space Grotesk"/>
-                <a:ea typeface="Space Grotesk"/>
-                <a:cs typeface="Space Grotesk"/>
+                <a:latin typeface="HK Grotesk"/>
+                <a:ea typeface="HK Grotesk"/>
+                <a:cs typeface="HK Grotesk"/>
               </a:rPr>
               <a:t>→</a:t>
             </a:r>
@@ -3837,9 +3837,9 @@
                 <a:solidFill>
                   <a:srgbClr val="14161A"/>
                 </a:solidFill>
-                <a:latin typeface="Space Grotesk"/>
-                <a:ea typeface="Space Grotesk"/>
-                <a:cs typeface="Space Grotesk"/>
+                <a:latin typeface="HK Grotesk"/>
+                <a:ea typeface="HK Grotesk"/>
+                <a:cs typeface="HK Grotesk"/>
               </a:rPr>
               <a:t>$895,000</a:t>
             </a:r>
@@ -3872,9 +3872,9 @@
                 <a:solidFill>
                   <a:srgbClr val="14161A"/>
                 </a:solidFill>
-                <a:latin typeface="Space Grotesk"/>
-                <a:ea typeface="Space Grotesk"/>
-                <a:cs typeface="Space Grotesk"/>
+                <a:latin typeface="HK Grotesk"/>
+                <a:ea typeface="HK Grotesk"/>
+                <a:cs typeface="HK Grotesk"/>
               </a:rPr>
               <a:t>1200 N Wells, 14C</a:t>
             </a:r>
@@ -3907,9 +3907,9 @@
                 <a:solidFill>
                   <a:srgbClr val="8A8F99"/>
                 </a:solidFill>
-                <a:latin typeface="Space Grotesk"/>
-                <a:ea typeface="Space Grotesk"/>
-                <a:cs typeface="Space Grotesk"/>
+                <a:latin typeface="HK Grotesk"/>
+                <a:ea typeface="HK Grotesk"/>
+                <a:cs typeface="HK Grotesk"/>
               </a:rPr>
               <a:t>River North, Chicago · 2 BD · 2 BA · 1,480 SF</a:t>
             </a:r>
